--- a/public/videos/repositories/work-bar-navi/work-bar-navi-tech-preview.pptx
+++ b/public/videos/repositories/work-bar-navi/work-bar-navi-tech-preview.pptx
@@ -134,7 +134,7 @@
           <p:cNvPr id="2" name="タイトル 1">
             <a:extLst>
               <a:ext uri="{FF2B5EF4-FFF2-40B4-BE49-F238E27FC236}">
-                <a16:creationId xmlns:a16="http://schemas.microsoft.com/office/drawing/2014/main" id="{F86D984C-A1C0-4994-D207-47F3DA489FBA}"/>
+                <a16:creationId xmlns:a16="http://schemas.microsoft.com/office/drawing/2014/main" id="{E66C02AF-758D-081E-76A8-A8EEA96A86F0}"/>
               </a:ext>
             </a:extLst>
           </p:cNvPr>
@@ -171,7 +171,7 @@
           <p:cNvPr id="3" name="字幕 2">
             <a:extLst>
               <a:ext uri="{FF2B5EF4-FFF2-40B4-BE49-F238E27FC236}">
-                <a16:creationId xmlns:a16="http://schemas.microsoft.com/office/drawing/2014/main" id="{39BB5B55-9F48-88AA-F83A-EDEA3A5B0C12}"/>
+                <a16:creationId xmlns:a16="http://schemas.microsoft.com/office/drawing/2014/main" id="{328C8AE0-831F-190C-32A8-698417E1CFE4}"/>
               </a:ext>
             </a:extLst>
           </p:cNvPr>
@@ -241,7 +241,7 @@
           <p:cNvPr id="4" name="日付プレースホルダー 3">
             <a:extLst>
               <a:ext uri="{FF2B5EF4-FFF2-40B4-BE49-F238E27FC236}">
-                <a16:creationId xmlns:a16="http://schemas.microsoft.com/office/drawing/2014/main" id="{5BBA9462-6EC5-D68A-D089-D833E6FE7586}"/>
+                <a16:creationId xmlns:a16="http://schemas.microsoft.com/office/drawing/2014/main" id="{C8E43D41-886A-A67A-F96F-30E2778DE92C}"/>
               </a:ext>
             </a:extLst>
           </p:cNvPr>
@@ -257,7 +257,7 @@
           <a:bodyPr/>
           <a:lstStyle/>
           <a:p>
-            <a:fld id="{6EB46A33-0AEF-471E-8391-11537EAA13C1}" type="datetimeFigureOut">
+            <a:fld id="{F7D6E4BD-B95D-4A7F-8880-9CD8EC4912DB}" type="datetimeFigureOut">
               <a:rPr kumimoji="1" lang="ja-JP" altLang="en-US" smtClean="0"/>
               <a:t>2026/7/30</a:t>
             </a:fld>
@@ -270,7 +270,7 @@
           <p:cNvPr id="5" name="フッター プレースホルダー 4">
             <a:extLst>
               <a:ext uri="{FF2B5EF4-FFF2-40B4-BE49-F238E27FC236}">
-                <a16:creationId xmlns:a16="http://schemas.microsoft.com/office/drawing/2014/main" id="{E467379F-704D-8255-2665-7B2C33959DA9}"/>
+                <a16:creationId xmlns:a16="http://schemas.microsoft.com/office/drawing/2014/main" id="{AD9B7DF9-6C45-6878-DDD9-F63174ED4DA0}"/>
               </a:ext>
             </a:extLst>
           </p:cNvPr>
@@ -295,7 +295,7 @@
           <p:cNvPr id="6" name="スライド番号プレースホルダー 5">
             <a:extLst>
               <a:ext uri="{FF2B5EF4-FFF2-40B4-BE49-F238E27FC236}">
-                <a16:creationId xmlns:a16="http://schemas.microsoft.com/office/drawing/2014/main" id="{BADD118E-1568-31E3-37DF-B544190B9068}"/>
+                <a16:creationId xmlns:a16="http://schemas.microsoft.com/office/drawing/2014/main" id="{B7DAC8EE-F153-2193-7EF9-4FDF821E0A5C}"/>
               </a:ext>
             </a:extLst>
           </p:cNvPr>
@@ -311,7 +311,7 @@
           <a:bodyPr/>
           <a:lstStyle/>
           <a:p>
-            <a:fld id="{4258680A-FB25-4801-BC9E-B38DD995FA88}" type="slidenum">
+            <a:fld id="{84F66F6F-710D-4E00-B59F-752C2B749C44}" type="slidenum">
               <a:rPr kumimoji="1" lang="ja-JP" altLang="en-US" smtClean="0"/>
               <a:t>‹#›</a:t>
             </a:fld>
@@ -322,7 +322,7 @@
     </p:spTree>
     <p:extLst>
       <p:ext uri="{BB962C8B-B14F-4D97-AF65-F5344CB8AC3E}">
-        <p14:creationId xmlns:p14="http://schemas.microsoft.com/office/powerpoint/2010/main" val="1797380524"/>
+        <p14:creationId xmlns:p14="http://schemas.microsoft.com/office/powerpoint/2010/main" val="1893047273"/>
       </p:ext>
     </p:extLst>
   </p:cSld>
@@ -354,7 +354,7 @@
           <p:cNvPr id="2" name="タイトル 1">
             <a:extLst>
               <a:ext uri="{FF2B5EF4-FFF2-40B4-BE49-F238E27FC236}">
-                <a16:creationId xmlns:a16="http://schemas.microsoft.com/office/drawing/2014/main" id="{29A460C9-1935-2386-AB82-AA80FFF65F1C}"/>
+                <a16:creationId xmlns:a16="http://schemas.microsoft.com/office/drawing/2014/main" id="{DC1CF4D0-24D8-A293-2176-1A42F82F95BB}"/>
               </a:ext>
             </a:extLst>
           </p:cNvPr>
@@ -382,7 +382,7 @@
           <p:cNvPr id="3" name="縦書きテキスト プレースホルダー 2">
             <a:extLst>
               <a:ext uri="{FF2B5EF4-FFF2-40B4-BE49-F238E27FC236}">
-                <a16:creationId xmlns:a16="http://schemas.microsoft.com/office/drawing/2014/main" id="{02CF2AFB-ABD4-1754-BB70-B5FBC0F970A0}"/>
+                <a16:creationId xmlns:a16="http://schemas.microsoft.com/office/drawing/2014/main" id="{C84336BE-D093-9E5F-FA47-B9A8AE348722}"/>
               </a:ext>
             </a:extLst>
           </p:cNvPr>
@@ -471,7 +471,7 @@
           <p:cNvPr id="4" name="日付プレースホルダー 3">
             <a:extLst>
               <a:ext uri="{FF2B5EF4-FFF2-40B4-BE49-F238E27FC236}">
-                <a16:creationId xmlns:a16="http://schemas.microsoft.com/office/drawing/2014/main" id="{109A898C-C00A-75C9-3FAD-0CCFB5EA674B}"/>
+                <a16:creationId xmlns:a16="http://schemas.microsoft.com/office/drawing/2014/main" id="{FA83E4FA-E0BC-A2A7-E04B-8E5EEED70BC5}"/>
               </a:ext>
             </a:extLst>
           </p:cNvPr>
@@ -487,7 +487,7 @@
           <a:bodyPr/>
           <a:lstStyle/>
           <a:p>
-            <a:fld id="{6EB46A33-0AEF-471E-8391-11537EAA13C1}" type="datetimeFigureOut">
+            <a:fld id="{F7D6E4BD-B95D-4A7F-8880-9CD8EC4912DB}" type="datetimeFigureOut">
               <a:rPr kumimoji="1" lang="ja-JP" altLang="en-US" smtClean="0"/>
               <a:t>2026/7/30</a:t>
             </a:fld>
@@ -500,7 +500,7 @@
           <p:cNvPr id="5" name="フッター プレースホルダー 4">
             <a:extLst>
               <a:ext uri="{FF2B5EF4-FFF2-40B4-BE49-F238E27FC236}">
-                <a16:creationId xmlns:a16="http://schemas.microsoft.com/office/drawing/2014/main" id="{58A87F9C-9C33-3BD4-E209-9CDCDDAA7127}"/>
+                <a16:creationId xmlns:a16="http://schemas.microsoft.com/office/drawing/2014/main" id="{6BB2373C-EDF7-0BCA-7113-0D2F1326740D}"/>
               </a:ext>
             </a:extLst>
           </p:cNvPr>
@@ -525,7 +525,7 @@
           <p:cNvPr id="6" name="スライド番号プレースホルダー 5">
             <a:extLst>
               <a:ext uri="{FF2B5EF4-FFF2-40B4-BE49-F238E27FC236}">
-                <a16:creationId xmlns:a16="http://schemas.microsoft.com/office/drawing/2014/main" id="{CC035934-A37E-EC4F-1B86-CE396359304A}"/>
+                <a16:creationId xmlns:a16="http://schemas.microsoft.com/office/drawing/2014/main" id="{D5AF252D-2A28-7B5E-BA4C-5790E86BEB46}"/>
               </a:ext>
             </a:extLst>
           </p:cNvPr>
@@ -541,7 +541,7 @@
           <a:bodyPr/>
           <a:lstStyle/>
           <a:p>
-            <a:fld id="{4258680A-FB25-4801-BC9E-B38DD995FA88}" type="slidenum">
+            <a:fld id="{84F66F6F-710D-4E00-B59F-752C2B749C44}" type="slidenum">
               <a:rPr kumimoji="1" lang="ja-JP" altLang="en-US" smtClean="0"/>
               <a:t>‹#›</a:t>
             </a:fld>
@@ -552,7 +552,7 @@
     </p:spTree>
     <p:extLst>
       <p:ext uri="{BB962C8B-B14F-4D97-AF65-F5344CB8AC3E}">
-        <p14:creationId xmlns:p14="http://schemas.microsoft.com/office/powerpoint/2010/main" val="2879197145"/>
+        <p14:creationId xmlns:p14="http://schemas.microsoft.com/office/powerpoint/2010/main" val="3349159867"/>
       </p:ext>
     </p:extLst>
   </p:cSld>
@@ -584,7 +584,7 @@
           <p:cNvPr id="2" name="縦書きタイトル 1">
             <a:extLst>
               <a:ext uri="{FF2B5EF4-FFF2-40B4-BE49-F238E27FC236}">
-                <a16:creationId xmlns:a16="http://schemas.microsoft.com/office/drawing/2014/main" id="{81BFA77F-753E-2D89-511F-8CF28AA71D26}"/>
+                <a16:creationId xmlns:a16="http://schemas.microsoft.com/office/drawing/2014/main" id="{7227F205-ADCE-4850-0B95-DC995F2731B3}"/>
               </a:ext>
             </a:extLst>
           </p:cNvPr>
@@ -617,7 +617,7 @@
           <p:cNvPr id="3" name="縦書きテキスト プレースホルダー 2">
             <a:extLst>
               <a:ext uri="{FF2B5EF4-FFF2-40B4-BE49-F238E27FC236}">
-                <a16:creationId xmlns:a16="http://schemas.microsoft.com/office/drawing/2014/main" id="{CA7AC7EB-EE47-DFA9-1D0C-0C2F401D9EE7}"/>
+                <a16:creationId xmlns:a16="http://schemas.microsoft.com/office/drawing/2014/main" id="{B8860E16-51F1-3AAC-FF75-27025E55CDC0}"/>
               </a:ext>
             </a:extLst>
           </p:cNvPr>
@@ -711,7 +711,7 @@
           <p:cNvPr id="4" name="日付プレースホルダー 3">
             <a:extLst>
               <a:ext uri="{FF2B5EF4-FFF2-40B4-BE49-F238E27FC236}">
-                <a16:creationId xmlns:a16="http://schemas.microsoft.com/office/drawing/2014/main" id="{917F7315-F1CF-72ED-D5BD-C38C9A23A6D4}"/>
+                <a16:creationId xmlns:a16="http://schemas.microsoft.com/office/drawing/2014/main" id="{73E5AD79-D00B-67EB-13AC-68A21147091A}"/>
               </a:ext>
             </a:extLst>
           </p:cNvPr>
@@ -727,7 +727,7 @@
           <a:bodyPr/>
           <a:lstStyle/>
           <a:p>
-            <a:fld id="{6EB46A33-0AEF-471E-8391-11537EAA13C1}" type="datetimeFigureOut">
+            <a:fld id="{F7D6E4BD-B95D-4A7F-8880-9CD8EC4912DB}" type="datetimeFigureOut">
               <a:rPr kumimoji="1" lang="ja-JP" altLang="en-US" smtClean="0"/>
               <a:t>2026/7/30</a:t>
             </a:fld>
@@ -740,7 +740,7 @@
           <p:cNvPr id="5" name="フッター プレースホルダー 4">
             <a:extLst>
               <a:ext uri="{FF2B5EF4-FFF2-40B4-BE49-F238E27FC236}">
-                <a16:creationId xmlns:a16="http://schemas.microsoft.com/office/drawing/2014/main" id="{11FB6FD1-779E-DC75-8933-5C2DB5EA359B}"/>
+                <a16:creationId xmlns:a16="http://schemas.microsoft.com/office/drawing/2014/main" id="{8F67AE73-13D9-9D1F-9293-7E35A3F6FB37}"/>
               </a:ext>
             </a:extLst>
           </p:cNvPr>
@@ -765,7 +765,7 @@
           <p:cNvPr id="6" name="スライド番号プレースホルダー 5">
             <a:extLst>
               <a:ext uri="{FF2B5EF4-FFF2-40B4-BE49-F238E27FC236}">
-                <a16:creationId xmlns:a16="http://schemas.microsoft.com/office/drawing/2014/main" id="{4FFB7337-D4AB-62A7-8E45-639A4A7E04A6}"/>
+                <a16:creationId xmlns:a16="http://schemas.microsoft.com/office/drawing/2014/main" id="{BCBB37C2-C71A-52CB-2934-3828C0BE98BC}"/>
               </a:ext>
             </a:extLst>
           </p:cNvPr>
@@ -781,7 +781,7 @@
           <a:bodyPr/>
           <a:lstStyle/>
           <a:p>
-            <a:fld id="{4258680A-FB25-4801-BC9E-B38DD995FA88}" type="slidenum">
+            <a:fld id="{84F66F6F-710D-4E00-B59F-752C2B749C44}" type="slidenum">
               <a:rPr kumimoji="1" lang="ja-JP" altLang="en-US" smtClean="0"/>
               <a:t>‹#›</a:t>
             </a:fld>
@@ -792,7 +792,7 @@
     </p:spTree>
     <p:extLst>
       <p:ext uri="{BB962C8B-B14F-4D97-AF65-F5344CB8AC3E}">
-        <p14:creationId xmlns:p14="http://schemas.microsoft.com/office/powerpoint/2010/main" val="2229567906"/>
+        <p14:creationId xmlns:p14="http://schemas.microsoft.com/office/powerpoint/2010/main" val="4008747588"/>
       </p:ext>
     </p:extLst>
   </p:cSld>
@@ -824,7 +824,7 @@
           <p:cNvPr id="2" name="タイトル 1">
             <a:extLst>
               <a:ext uri="{FF2B5EF4-FFF2-40B4-BE49-F238E27FC236}">
-                <a16:creationId xmlns:a16="http://schemas.microsoft.com/office/drawing/2014/main" id="{B0F49B25-9B45-0FD9-CC01-F6E3D916B094}"/>
+                <a16:creationId xmlns:a16="http://schemas.microsoft.com/office/drawing/2014/main" id="{48CA4383-2F32-F9DF-0502-AB319C32E987}"/>
               </a:ext>
             </a:extLst>
           </p:cNvPr>
@@ -852,7 +852,7 @@
           <p:cNvPr id="3" name="コンテンツ プレースホルダー 2">
             <a:extLst>
               <a:ext uri="{FF2B5EF4-FFF2-40B4-BE49-F238E27FC236}">
-                <a16:creationId xmlns:a16="http://schemas.microsoft.com/office/drawing/2014/main" id="{CEAAA885-CCEB-B5DB-8949-CE100B71E605}"/>
+                <a16:creationId xmlns:a16="http://schemas.microsoft.com/office/drawing/2014/main" id="{5C52BD6A-6C39-BD72-A806-3543B221A73F}"/>
               </a:ext>
             </a:extLst>
           </p:cNvPr>
@@ -941,7 +941,7 @@
           <p:cNvPr id="4" name="日付プレースホルダー 3">
             <a:extLst>
               <a:ext uri="{FF2B5EF4-FFF2-40B4-BE49-F238E27FC236}">
-                <a16:creationId xmlns:a16="http://schemas.microsoft.com/office/drawing/2014/main" id="{8155DE4E-901D-BC31-8022-688E95963853}"/>
+                <a16:creationId xmlns:a16="http://schemas.microsoft.com/office/drawing/2014/main" id="{A1A8CA65-9458-340B-A23F-812449D34628}"/>
               </a:ext>
             </a:extLst>
           </p:cNvPr>
@@ -957,7 +957,7 @@
           <a:bodyPr/>
           <a:lstStyle/>
           <a:p>
-            <a:fld id="{6EB46A33-0AEF-471E-8391-11537EAA13C1}" type="datetimeFigureOut">
+            <a:fld id="{F7D6E4BD-B95D-4A7F-8880-9CD8EC4912DB}" type="datetimeFigureOut">
               <a:rPr kumimoji="1" lang="ja-JP" altLang="en-US" smtClean="0"/>
               <a:t>2026/7/30</a:t>
             </a:fld>
@@ -970,7 +970,7 @@
           <p:cNvPr id="5" name="フッター プレースホルダー 4">
             <a:extLst>
               <a:ext uri="{FF2B5EF4-FFF2-40B4-BE49-F238E27FC236}">
-                <a16:creationId xmlns:a16="http://schemas.microsoft.com/office/drawing/2014/main" id="{DD18C856-822A-7515-7950-68D2B9E09AC4}"/>
+                <a16:creationId xmlns:a16="http://schemas.microsoft.com/office/drawing/2014/main" id="{255E9A43-184E-6204-A59A-64C86CC7AC12}"/>
               </a:ext>
             </a:extLst>
           </p:cNvPr>
@@ -995,7 +995,7 @@
           <p:cNvPr id="6" name="スライド番号プレースホルダー 5">
             <a:extLst>
               <a:ext uri="{FF2B5EF4-FFF2-40B4-BE49-F238E27FC236}">
-                <a16:creationId xmlns:a16="http://schemas.microsoft.com/office/drawing/2014/main" id="{DC25CBA9-3B8C-C9DD-1647-627D87E60D4B}"/>
+                <a16:creationId xmlns:a16="http://schemas.microsoft.com/office/drawing/2014/main" id="{1EF4B41E-F6E2-F7C3-159F-B0C3F1D48F7E}"/>
               </a:ext>
             </a:extLst>
           </p:cNvPr>
@@ -1011,7 +1011,7 @@
           <a:bodyPr/>
           <a:lstStyle/>
           <a:p>
-            <a:fld id="{4258680A-FB25-4801-BC9E-B38DD995FA88}" type="slidenum">
+            <a:fld id="{84F66F6F-710D-4E00-B59F-752C2B749C44}" type="slidenum">
               <a:rPr kumimoji="1" lang="ja-JP" altLang="en-US" smtClean="0"/>
               <a:t>‹#›</a:t>
             </a:fld>
@@ -1022,7 +1022,7 @@
     </p:spTree>
     <p:extLst>
       <p:ext uri="{BB962C8B-B14F-4D97-AF65-F5344CB8AC3E}">
-        <p14:creationId xmlns:p14="http://schemas.microsoft.com/office/powerpoint/2010/main" val="3997780099"/>
+        <p14:creationId xmlns:p14="http://schemas.microsoft.com/office/powerpoint/2010/main" val="412506234"/>
       </p:ext>
     </p:extLst>
   </p:cSld>
@@ -1054,7 +1054,7 @@
           <p:cNvPr id="2" name="タイトル 1">
             <a:extLst>
               <a:ext uri="{FF2B5EF4-FFF2-40B4-BE49-F238E27FC236}">
-                <a16:creationId xmlns:a16="http://schemas.microsoft.com/office/drawing/2014/main" id="{43577A39-2143-D393-D8AC-A763A7036C62}"/>
+                <a16:creationId xmlns:a16="http://schemas.microsoft.com/office/drawing/2014/main" id="{5AA308E9-C984-972A-43C5-EDAF8063A59D}"/>
               </a:ext>
             </a:extLst>
           </p:cNvPr>
@@ -1091,7 +1091,7 @@
           <p:cNvPr id="3" name="テキスト プレースホルダー 2">
             <a:extLst>
               <a:ext uri="{FF2B5EF4-FFF2-40B4-BE49-F238E27FC236}">
-                <a16:creationId xmlns:a16="http://schemas.microsoft.com/office/drawing/2014/main" id="{9DAE77E5-EFE9-4C7F-08ED-B663A6902CEB}"/>
+                <a16:creationId xmlns:a16="http://schemas.microsoft.com/office/drawing/2014/main" id="{5C1A9C49-F497-CABD-2AA9-2282BA41D234}"/>
               </a:ext>
             </a:extLst>
           </p:cNvPr>
@@ -1216,7 +1216,7 @@
           <p:cNvPr id="4" name="日付プレースホルダー 3">
             <a:extLst>
               <a:ext uri="{FF2B5EF4-FFF2-40B4-BE49-F238E27FC236}">
-                <a16:creationId xmlns:a16="http://schemas.microsoft.com/office/drawing/2014/main" id="{806C8646-7F40-A625-4283-592D8C7F1E41}"/>
+                <a16:creationId xmlns:a16="http://schemas.microsoft.com/office/drawing/2014/main" id="{7FC7DC3A-51A5-0686-7A77-14EA34631AF5}"/>
               </a:ext>
             </a:extLst>
           </p:cNvPr>
@@ -1232,7 +1232,7 @@
           <a:bodyPr/>
           <a:lstStyle/>
           <a:p>
-            <a:fld id="{6EB46A33-0AEF-471E-8391-11537EAA13C1}" type="datetimeFigureOut">
+            <a:fld id="{F7D6E4BD-B95D-4A7F-8880-9CD8EC4912DB}" type="datetimeFigureOut">
               <a:rPr kumimoji="1" lang="ja-JP" altLang="en-US" smtClean="0"/>
               <a:t>2026/7/30</a:t>
             </a:fld>
@@ -1245,7 +1245,7 @@
           <p:cNvPr id="5" name="フッター プレースホルダー 4">
             <a:extLst>
               <a:ext uri="{FF2B5EF4-FFF2-40B4-BE49-F238E27FC236}">
-                <a16:creationId xmlns:a16="http://schemas.microsoft.com/office/drawing/2014/main" id="{212A4823-395B-6668-6081-F70D0F466FB5}"/>
+                <a16:creationId xmlns:a16="http://schemas.microsoft.com/office/drawing/2014/main" id="{3446AD34-5684-98E9-4AE1-F5BD6772259F}"/>
               </a:ext>
             </a:extLst>
           </p:cNvPr>
@@ -1270,7 +1270,7 @@
           <p:cNvPr id="6" name="スライド番号プレースホルダー 5">
             <a:extLst>
               <a:ext uri="{FF2B5EF4-FFF2-40B4-BE49-F238E27FC236}">
-                <a16:creationId xmlns:a16="http://schemas.microsoft.com/office/drawing/2014/main" id="{3099451F-99BC-19F0-EB49-7BA75E5B7F27}"/>
+                <a16:creationId xmlns:a16="http://schemas.microsoft.com/office/drawing/2014/main" id="{51396B7A-7708-F1D4-BD34-2A9D51883EAE}"/>
               </a:ext>
             </a:extLst>
           </p:cNvPr>
@@ -1286,7 +1286,7 @@
           <a:bodyPr/>
           <a:lstStyle/>
           <a:p>
-            <a:fld id="{4258680A-FB25-4801-BC9E-B38DD995FA88}" type="slidenum">
+            <a:fld id="{84F66F6F-710D-4E00-B59F-752C2B749C44}" type="slidenum">
               <a:rPr kumimoji="1" lang="ja-JP" altLang="en-US" smtClean="0"/>
               <a:t>‹#›</a:t>
             </a:fld>
@@ -1297,7 +1297,7 @@
     </p:spTree>
     <p:extLst>
       <p:ext uri="{BB962C8B-B14F-4D97-AF65-F5344CB8AC3E}">
-        <p14:creationId xmlns:p14="http://schemas.microsoft.com/office/powerpoint/2010/main" val="1292503898"/>
+        <p14:creationId xmlns:p14="http://schemas.microsoft.com/office/powerpoint/2010/main" val="1212524591"/>
       </p:ext>
     </p:extLst>
   </p:cSld>
@@ -1329,7 +1329,7 @@
           <p:cNvPr id="2" name="タイトル 1">
             <a:extLst>
               <a:ext uri="{FF2B5EF4-FFF2-40B4-BE49-F238E27FC236}">
-                <a16:creationId xmlns:a16="http://schemas.microsoft.com/office/drawing/2014/main" id="{06704BC6-A984-8906-9FC1-9FFF2758D1EC}"/>
+                <a16:creationId xmlns:a16="http://schemas.microsoft.com/office/drawing/2014/main" id="{3E842AC6-BA78-2E54-F44F-3B44B337D544}"/>
               </a:ext>
             </a:extLst>
           </p:cNvPr>
@@ -1357,7 +1357,7 @@
           <p:cNvPr id="3" name="コンテンツ プレースホルダー 2">
             <a:extLst>
               <a:ext uri="{FF2B5EF4-FFF2-40B4-BE49-F238E27FC236}">
-                <a16:creationId xmlns:a16="http://schemas.microsoft.com/office/drawing/2014/main" id="{27A5CDC6-E342-FDA8-2517-DFAAE0A8F5F7}"/>
+                <a16:creationId xmlns:a16="http://schemas.microsoft.com/office/drawing/2014/main" id="{B05CB4A4-AE40-FF41-ADCA-90B37EAA9B8F}"/>
               </a:ext>
             </a:extLst>
           </p:cNvPr>
@@ -1451,7 +1451,7 @@
           <p:cNvPr id="4" name="コンテンツ プレースホルダー 3">
             <a:extLst>
               <a:ext uri="{FF2B5EF4-FFF2-40B4-BE49-F238E27FC236}">
-                <a16:creationId xmlns:a16="http://schemas.microsoft.com/office/drawing/2014/main" id="{4EA4812C-B012-4549-87FB-DA25D0B30B2C}"/>
+                <a16:creationId xmlns:a16="http://schemas.microsoft.com/office/drawing/2014/main" id="{6116BD3D-33B8-EC64-93A6-28449CC4D2CA}"/>
               </a:ext>
             </a:extLst>
           </p:cNvPr>
@@ -1545,7 +1545,7 @@
           <p:cNvPr id="5" name="日付プレースホルダー 4">
             <a:extLst>
               <a:ext uri="{FF2B5EF4-FFF2-40B4-BE49-F238E27FC236}">
-                <a16:creationId xmlns:a16="http://schemas.microsoft.com/office/drawing/2014/main" id="{96B07BD0-FE2B-6E5F-8B5E-D05DAA7B5725}"/>
+                <a16:creationId xmlns:a16="http://schemas.microsoft.com/office/drawing/2014/main" id="{C1A6B97A-EF1B-E6AE-0418-DA9CD2EAD07D}"/>
               </a:ext>
             </a:extLst>
           </p:cNvPr>
@@ -1561,7 +1561,7 @@
           <a:bodyPr/>
           <a:lstStyle/>
           <a:p>
-            <a:fld id="{6EB46A33-0AEF-471E-8391-11537EAA13C1}" type="datetimeFigureOut">
+            <a:fld id="{F7D6E4BD-B95D-4A7F-8880-9CD8EC4912DB}" type="datetimeFigureOut">
               <a:rPr kumimoji="1" lang="ja-JP" altLang="en-US" smtClean="0"/>
               <a:t>2026/7/30</a:t>
             </a:fld>
@@ -1574,7 +1574,7 @@
           <p:cNvPr id="6" name="フッター プレースホルダー 5">
             <a:extLst>
               <a:ext uri="{FF2B5EF4-FFF2-40B4-BE49-F238E27FC236}">
-                <a16:creationId xmlns:a16="http://schemas.microsoft.com/office/drawing/2014/main" id="{5D2824C8-8283-95F9-40A0-D5B14AD425A1}"/>
+                <a16:creationId xmlns:a16="http://schemas.microsoft.com/office/drawing/2014/main" id="{5CB13A21-3355-0E31-64DE-63B9A295F38D}"/>
               </a:ext>
             </a:extLst>
           </p:cNvPr>
@@ -1599,7 +1599,7 @@
           <p:cNvPr id="7" name="スライド番号プレースホルダー 6">
             <a:extLst>
               <a:ext uri="{FF2B5EF4-FFF2-40B4-BE49-F238E27FC236}">
-                <a16:creationId xmlns:a16="http://schemas.microsoft.com/office/drawing/2014/main" id="{F85D5F2C-CE08-DAD7-2D50-9BFF11253BDE}"/>
+                <a16:creationId xmlns:a16="http://schemas.microsoft.com/office/drawing/2014/main" id="{95711FF6-C6F8-A9C8-0E01-BAED67D6F26D}"/>
               </a:ext>
             </a:extLst>
           </p:cNvPr>
@@ -1615,7 +1615,7 @@
           <a:bodyPr/>
           <a:lstStyle/>
           <a:p>
-            <a:fld id="{4258680A-FB25-4801-BC9E-B38DD995FA88}" type="slidenum">
+            <a:fld id="{84F66F6F-710D-4E00-B59F-752C2B749C44}" type="slidenum">
               <a:rPr kumimoji="1" lang="ja-JP" altLang="en-US" smtClean="0"/>
               <a:t>‹#›</a:t>
             </a:fld>
@@ -1626,7 +1626,7 @@
     </p:spTree>
     <p:extLst>
       <p:ext uri="{BB962C8B-B14F-4D97-AF65-F5344CB8AC3E}">
-        <p14:creationId xmlns:p14="http://schemas.microsoft.com/office/powerpoint/2010/main" val="3455645115"/>
+        <p14:creationId xmlns:p14="http://schemas.microsoft.com/office/powerpoint/2010/main" val="2360135216"/>
       </p:ext>
     </p:extLst>
   </p:cSld>
@@ -1658,7 +1658,7 @@
           <p:cNvPr id="2" name="タイトル 1">
             <a:extLst>
               <a:ext uri="{FF2B5EF4-FFF2-40B4-BE49-F238E27FC236}">
-                <a16:creationId xmlns:a16="http://schemas.microsoft.com/office/drawing/2014/main" id="{EA8ABBD2-EC96-553C-82A6-A86EEE0ABA34}"/>
+                <a16:creationId xmlns:a16="http://schemas.microsoft.com/office/drawing/2014/main" id="{79B917EF-302F-D42F-160D-241C1684C670}"/>
               </a:ext>
             </a:extLst>
           </p:cNvPr>
@@ -1691,7 +1691,7 @@
           <p:cNvPr id="3" name="テキスト プレースホルダー 2">
             <a:extLst>
               <a:ext uri="{FF2B5EF4-FFF2-40B4-BE49-F238E27FC236}">
-                <a16:creationId xmlns:a16="http://schemas.microsoft.com/office/drawing/2014/main" id="{E8500CE1-3B57-E246-EB6F-289B91C12F32}"/>
+                <a16:creationId xmlns:a16="http://schemas.microsoft.com/office/drawing/2014/main" id="{B547D651-3CA4-0F24-08A3-B42740AF4E78}"/>
               </a:ext>
             </a:extLst>
           </p:cNvPr>
@@ -1762,7 +1762,7 @@
           <p:cNvPr id="4" name="コンテンツ プレースホルダー 3">
             <a:extLst>
               <a:ext uri="{FF2B5EF4-FFF2-40B4-BE49-F238E27FC236}">
-                <a16:creationId xmlns:a16="http://schemas.microsoft.com/office/drawing/2014/main" id="{E2B6D6E4-484C-FDCC-9143-7A47FA769EFE}"/>
+                <a16:creationId xmlns:a16="http://schemas.microsoft.com/office/drawing/2014/main" id="{5F65DEAB-8F73-497C-0FEC-E09CB65CEBDC}"/>
               </a:ext>
             </a:extLst>
           </p:cNvPr>
@@ -1856,7 +1856,7 @@
           <p:cNvPr id="5" name="テキスト プレースホルダー 4">
             <a:extLst>
               <a:ext uri="{FF2B5EF4-FFF2-40B4-BE49-F238E27FC236}">
-                <a16:creationId xmlns:a16="http://schemas.microsoft.com/office/drawing/2014/main" id="{6207835A-7F9A-1368-83FA-93C5E13F6E41}"/>
+                <a16:creationId xmlns:a16="http://schemas.microsoft.com/office/drawing/2014/main" id="{0EB2BB35-F787-97E6-EF3E-C2EBAB19389D}"/>
               </a:ext>
             </a:extLst>
           </p:cNvPr>
@@ -1927,7 +1927,7 @@
           <p:cNvPr id="6" name="コンテンツ プレースホルダー 5">
             <a:extLst>
               <a:ext uri="{FF2B5EF4-FFF2-40B4-BE49-F238E27FC236}">
-                <a16:creationId xmlns:a16="http://schemas.microsoft.com/office/drawing/2014/main" id="{47E9FEF7-99ED-1B24-00E8-CB6F10B8670C}"/>
+                <a16:creationId xmlns:a16="http://schemas.microsoft.com/office/drawing/2014/main" id="{376AF5D1-5FE4-3DA1-4F8A-77DBD0BCE156}"/>
               </a:ext>
             </a:extLst>
           </p:cNvPr>
@@ -2021,7 +2021,7 @@
           <p:cNvPr id="7" name="日付プレースホルダー 6">
             <a:extLst>
               <a:ext uri="{FF2B5EF4-FFF2-40B4-BE49-F238E27FC236}">
-                <a16:creationId xmlns:a16="http://schemas.microsoft.com/office/drawing/2014/main" id="{EBE4AE37-F6F7-0DC7-1CD0-AC1DF6900AD1}"/>
+                <a16:creationId xmlns:a16="http://schemas.microsoft.com/office/drawing/2014/main" id="{3EB53C0C-647B-B05F-5439-E91A9AB55CAD}"/>
               </a:ext>
             </a:extLst>
           </p:cNvPr>
@@ -2037,7 +2037,7 @@
           <a:bodyPr/>
           <a:lstStyle/>
           <a:p>
-            <a:fld id="{6EB46A33-0AEF-471E-8391-11537EAA13C1}" type="datetimeFigureOut">
+            <a:fld id="{F7D6E4BD-B95D-4A7F-8880-9CD8EC4912DB}" type="datetimeFigureOut">
               <a:rPr kumimoji="1" lang="ja-JP" altLang="en-US" smtClean="0"/>
               <a:t>2026/7/30</a:t>
             </a:fld>
@@ -2050,7 +2050,7 @@
           <p:cNvPr id="8" name="フッター プレースホルダー 7">
             <a:extLst>
               <a:ext uri="{FF2B5EF4-FFF2-40B4-BE49-F238E27FC236}">
-                <a16:creationId xmlns:a16="http://schemas.microsoft.com/office/drawing/2014/main" id="{4DB7E60A-4DF8-B91F-F162-612C5E7610BD}"/>
+                <a16:creationId xmlns:a16="http://schemas.microsoft.com/office/drawing/2014/main" id="{AFD762DB-930B-2AD4-A056-585E9C7E0456}"/>
               </a:ext>
             </a:extLst>
           </p:cNvPr>
@@ -2075,7 +2075,7 @@
           <p:cNvPr id="9" name="スライド番号プレースホルダー 8">
             <a:extLst>
               <a:ext uri="{FF2B5EF4-FFF2-40B4-BE49-F238E27FC236}">
-                <a16:creationId xmlns:a16="http://schemas.microsoft.com/office/drawing/2014/main" id="{2EBF9726-92D4-8696-03C6-408CE25EEC8D}"/>
+                <a16:creationId xmlns:a16="http://schemas.microsoft.com/office/drawing/2014/main" id="{09B6D4B2-1626-55EA-F404-6B417F86913E}"/>
               </a:ext>
             </a:extLst>
           </p:cNvPr>
@@ -2091,7 +2091,7 @@
           <a:bodyPr/>
           <a:lstStyle/>
           <a:p>
-            <a:fld id="{4258680A-FB25-4801-BC9E-B38DD995FA88}" type="slidenum">
+            <a:fld id="{84F66F6F-710D-4E00-B59F-752C2B749C44}" type="slidenum">
               <a:rPr kumimoji="1" lang="ja-JP" altLang="en-US" smtClean="0"/>
               <a:t>‹#›</a:t>
             </a:fld>
@@ -2102,7 +2102,7 @@
     </p:spTree>
     <p:extLst>
       <p:ext uri="{BB962C8B-B14F-4D97-AF65-F5344CB8AC3E}">
-        <p14:creationId xmlns:p14="http://schemas.microsoft.com/office/powerpoint/2010/main" val="1771301255"/>
+        <p14:creationId xmlns:p14="http://schemas.microsoft.com/office/powerpoint/2010/main" val="4258494759"/>
       </p:ext>
     </p:extLst>
   </p:cSld>
@@ -2134,7 +2134,7 @@
           <p:cNvPr id="2" name="タイトル 1">
             <a:extLst>
               <a:ext uri="{FF2B5EF4-FFF2-40B4-BE49-F238E27FC236}">
-                <a16:creationId xmlns:a16="http://schemas.microsoft.com/office/drawing/2014/main" id="{C0E65553-457D-693A-6B62-4463CAFC3864}"/>
+                <a16:creationId xmlns:a16="http://schemas.microsoft.com/office/drawing/2014/main" id="{6B5BD497-5419-1A78-FBF7-ADA19B4FC8A0}"/>
               </a:ext>
             </a:extLst>
           </p:cNvPr>
@@ -2162,7 +2162,7 @@
           <p:cNvPr id="3" name="日付プレースホルダー 2">
             <a:extLst>
               <a:ext uri="{FF2B5EF4-FFF2-40B4-BE49-F238E27FC236}">
-                <a16:creationId xmlns:a16="http://schemas.microsoft.com/office/drawing/2014/main" id="{CDEF19B2-170D-671D-8281-119C22E30B50}"/>
+                <a16:creationId xmlns:a16="http://schemas.microsoft.com/office/drawing/2014/main" id="{32DF984A-7AC1-28CC-0775-11A194E45C56}"/>
               </a:ext>
             </a:extLst>
           </p:cNvPr>
@@ -2178,7 +2178,7 @@
           <a:bodyPr/>
           <a:lstStyle/>
           <a:p>
-            <a:fld id="{6EB46A33-0AEF-471E-8391-11537EAA13C1}" type="datetimeFigureOut">
+            <a:fld id="{F7D6E4BD-B95D-4A7F-8880-9CD8EC4912DB}" type="datetimeFigureOut">
               <a:rPr kumimoji="1" lang="ja-JP" altLang="en-US" smtClean="0"/>
               <a:t>2026/7/30</a:t>
             </a:fld>
@@ -2191,7 +2191,7 @@
           <p:cNvPr id="4" name="フッター プレースホルダー 3">
             <a:extLst>
               <a:ext uri="{FF2B5EF4-FFF2-40B4-BE49-F238E27FC236}">
-                <a16:creationId xmlns:a16="http://schemas.microsoft.com/office/drawing/2014/main" id="{461E92C6-6CDF-5366-FB01-B28E5446C10A}"/>
+                <a16:creationId xmlns:a16="http://schemas.microsoft.com/office/drawing/2014/main" id="{C712ACEF-9388-F62A-78F2-CE5E712EE99A}"/>
               </a:ext>
             </a:extLst>
           </p:cNvPr>
@@ -2216,7 +2216,7 @@
           <p:cNvPr id="5" name="スライド番号プレースホルダー 4">
             <a:extLst>
               <a:ext uri="{FF2B5EF4-FFF2-40B4-BE49-F238E27FC236}">
-                <a16:creationId xmlns:a16="http://schemas.microsoft.com/office/drawing/2014/main" id="{118E434D-5BE4-0B14-B612-175F6A169D81}"/>
+                <a16:creationId xmlns:a16="http://schemas.microsoft.com/office/drawing/2014/main" id="{38534912-B6A9-276B-8C53-B4AFB079D8CD}"/>
               </a:ext>
             </a:extLst>
           </p:cNvPr>
@@ -2232,7 +2232,7 @@
           <a:bodyPr/>
           <a:lstStyle/>
           <a:p>
-            <a:fld id="{4258680A-FB25-4801-BC9E-B38DD995FA88}" type="slidenum">
+            <a:fld id="{84F66F6F-710D-4E00-B59F-752C2B749C44}" type="slidenum">
               <a:rPr kumimoji="1" lang="ja-JP" altLang="en-US" smtClean="0"/>
               <a:t>‹#›</a:t>
             </a:fld>
@@ -2243,7 +2243,7 @@
     </p:spTree>
     <p:extLst>
       <p:ext uri="{BB962C8B-B14F-4D97-AF65-F5344CB8AC3E}">
-        <p14:creationId xmlns:p14="http://schemas.microsoft.com/office/powerpoint/2010/main" val="4292869699"/>
+        <p14:creationId xmlns:p14="http://schemas.microsoft.com/office/powerpoint/2010/main" val="435582678"/>
       </p:ext>
     </p:extLst>
   </p:cSld>
@@ -2275,7 +2275,7 @@
           <p:cNvPr id="2" name="日付プレースホルダー 1">
             <a:extLst>
               <a:ext uri="{FF2B5EF4-FFF2-40B4-BE49-F238E27FC236}">
-                <a16:creationId xmlns:a16="http://schemas.microsoft.com/office/drawing/2014/main" id="{B0836F12-3779-1625-4FA2-CD47A817BBA3}"/>
+                <a16:creationId xmlns:a16="http://schemas.microsoft.com/office/drawing/2014/main" id="{C7C6550B-3242-312B-C16D-81DF49F690EC}"/>
               </a:ext>
             </a:extLst>
           </p:cNvPr>
@@ -2291,7 +2291,7 @@
           <a:bodyPr/>
           <a:lstStyle/>
           <a:p>
-            <a:fld id="{6EB46A33-0AEF-471E-8391-11537EAA13C1}" type="datetimeFigureOut">
+            <a:fld id="{F7D6E4BD-B95D-4A7F-8880-9CD8EC4912DB}" type="datetimeFigureOut">
               <a:rPr kumimoji="1" lang="ja-JP" altLang="en-US" smtClean="0"/>
               <a:t>2026/7/30</a:t>
             </a:fld>
@@ -2304,7 +2304,7 @@
           <p:cNvPr id="3" name="フッター プレースホルダー 2">
             <a:extLst>
               <a:ext uri="{FF2B5EF4-FFF2-40B4-BE49-F238E27FC236}">
-                <a16:creationId xmlns:a16="http://schemas.microsoft.com/office/drawing/2014/main" id="{D19F3A5C-8AD6-63EC-F2C7-0AD51565C551}"/>
+                <a16:creationId xmlns:a16="http://schemas.microsoft.com/office/drawing/2014/main" id="{36A811D1-54DE-8A0D-A12E-E878278B0776}"/>
               </a:ext>
             </a:extLst>
           </p:cNvPr>
@@ -2329,7 +2329,7 @@
           <p:cNvPr id="4" name="スライド番号プレースホルダー 3">
             <a:extLst>
               <a:ext uri="{FF2B5EF4-FFF2-40B4-BE49-F238E27FC236}">
-                <a16:creationId xmlns:a16="http://schemas.microsoft.com/office/drawing/2014/main" id="{2A81EEBD-868F-4229-DF7F-BCD5A7B42AEA}"/>
+                <a16:creationId xmlns:a16="http://schemas.microsoft.com/office/drawing/2014/main" id="{065E0078-8C8F-F73F-24AB-20D6592AA526}"/>
               </a:ext>
             </a:extLst>
           </p:cNvPr>
@@ -2345,7 +2345,7 @@
           <a:bodyPr/>
           <a:lstStyle/>
           <a:p>
-            <a:fld id="{4258680A-FB25-4801-BC9E-B38DD995FA88}" type="slidenum">
+            <a:fld id="{84F66F6F-710D-4E00-B59F-752C2B749C44}" type="slidenum">
               <a:rPr kumimoji="1" lang="ja-JP" altLang="en-US" smtClean="0"/>
               <a:t>‹#›</a:t>
             </a:fld>
@@ -2356,7 +2356,7 @@
     </p:spTree>
     <p:extLst>
       <p:ext uri="{BB962C8B-B14F-4D97-AF65-F5344CB8AC3E}">
-        <p14:creationId xmlns:p14="http://schemas.microsoft.com/office/powerpoint/2010/main" val="4221496804"/>
+        <p14:creationId xmlns:p14="http://schemas.microsoft.com/office/powerpoint/2010/main" val="798326077"/>
       </p:ext>
     </p:extLst>
   </p:cSld>
@@ -2388,7 +2388,7 @@
           <p:cNvPr id="2" name="タイトル 1">
             <a:extLst>
               <a:ext uri="{FF2B5EF4-FFF2-40B4-BE49-F238E27FC236}">
-                <a16:creationId xmlns:a16="http://schemas.microsoft.com/office/drawing/2014/main" id="{DFD14874-C238-A9BC-1356-25821286B655}"/>
+                <a16:creationId xmlns:a16="http://schemas.microsoft.com/office/drawing/2014/main" id="{33FA0DB4-955B-4DC4-A85D-9F29A02F96E1}"/>
               </a:ext>
             </a:extLst>
           </p:cNvPr>
@@ -2425,7 +2425,7 @@
           <p:cNvPr id="3" name="コンテンツ プレースホルダー 2">
             <a:extLst>
               <a:ext uri="{FF2B5EF4-FFF2-40B4-BE49-F238E27FC236}">
-                <a16:creationId xmlns:a16="http://schemas.microsoft.com/office/drawing/2014/main" id="{5FD720B4-D4AC-9A7E-756B-06DA8B2061B2}"/>
+                <a16:creationId xmlns:a16="http://schemas.microsoft.com/office/drawing/2014/main" id="{C23342A3-7BB5-4E32-A336-27F5D5EE11E2}"/>
               </a:ext>
             </a:extLst>
           </p:cNvPr>
@@ -2547,7 +2547,7 @@
           <p:cNvPr id="4" name="テキスト プレースホルダー 3">
             <a:extLst>
               <a:ext uri="{FF2B5EF4-FFF2-40B4-BE49-F238E27FC236}">
-                <a16:creationId xmlns:a16="http://schemas.microsoft.com/office/drawing/2014/main" id="{AC7C0003-3228-F291-B37A-82CE0988FF9E}"/>
+                <a16:creationId xmlns:a16="http://schemas.microsoft.com/office/drawing/2014/main" id="{C48191DB-37D1-BFBF-FE98-07AFAECE50C3}"/>
               </a:ext>
             </a:extLst>
           </p:cNvPr>
@@ -2618,7 +2618,7 @@
           <p:cNvPr id="5" name="日付プレースホルダー 4">
             <a:extLst>
               <a:ext uri="{FF2B5EF4-FFF2-40B4-BE49-F238E27FC236}">
-                <a16:creationId xmlns:a16="http://schemas.microsoft.com/office/drawing/2014/main" id="{571C9F13-2B12-AD2E-4D01-EBFC038F92CC}"/>
+                <a16:creationId xmlns:a16="http://schemas.microsoft.com/office/drawing/2014/main" id="{D63BD14A-441E-0741-498B-5805C9965676}"/>
               </a:ext>
             </a:extLst>
           </p:cNvPr>
@@ -2634,7 +2634,7 @@
           <a:bodyPr/>
           <a:lstStyle/>
           <a:p>
-            <a:fld id="{6EB46A33-0AEF-471E-8391-11537EAA13C1}" type="datetimeFigureOut">
+            <a:fld id="{F7D6E4BD-B95D-4A7F-8880-9CD8EC4912DB}" type="datetimeFigureOut">
               <a:rPr kumimoji="1" lang="ja-JP" altLang="en-US" smtClean="0"/>
               <a:t>2026/7/30</a:t>
             </a:fld>
@@ -2647,7 +2647,7 @@
           <p:cNvPr id="6" name="フッター プレースホルダー 5">
             <a:extLst>
               <a:ext uri="{FF2B5EF4-FFF2-40B4-BE49-F238E27FC236}">
-                <a16:creationId xmlns:a16="http://schemas.microsoft.com/office/drawing/2014/main" id="{137E5CEE-0F7C-CB22-1D45-E7EB5EF72CC6}"/>
+                <a16:creationId xmlns:a16="http://schemas.microsoft.com/office/drawing/2014/main" id="{127E5599-40EC-CAD8-5B8D-75F576CD88F5}"/>
               </a:ext>
             </a:extLst>
           </p:cNvPr>
@@ -2672,7 +2672,7 @@
           <p:cNvPr id="7" name="スライド番号プレースホルダー 6">
             <a:extLst>
               <a:ext uri="{FF2B5EF4-FFF2-40B4-BE49-F238E27FC236}">
-                <a16:creationId xmlns:a16="http://schemas.microsoft.com/office/drawing/2014/main" id="{28F53585-0A0C-61D3-2580-C92F0D5314D8}"/>
+                <a16:creationId xmlns:a16="http://schemas.microsoft.com/office/drawing/2014/main" id="{620ADD21-E4A6-A2A6-F10D-C75D36FB0769}"/>
               </a:ext>
             </a:extLst>
           </p:cNvPr>
@@ -2688,7 +2688,7 @@
           <a:bodyPr/>
           <a:lstStyle/>
           <a:p>
-            <a:fld id="{4258680A-FB25-4801-BC9E-B38DD995FA88}" type="slidenum">
+            <a:fld id="{84F66F6F-710D-4E00-B59F-752C2B749C44}" type="slidenum">
               <a:rPr kumimoji="1" lang="ja-JP" altLang="en-US" smtClean="0"/>
               <a:t>‹#›</a:t>
             </a:fld>
@@ -2699,7 +2699,7 @@
     </p:spTree>
     <p:extLst>
       <p:ext uri="{BB962C8B-B14F-4D97-AF65-F5344CB8AC3E}">
-        <p14:creationId xmlns:p14="http://schemas.microsoft.com/office/powerpoint/2010/main" val="1172073498"/>
+        <p14:creationId xmlns:p14="http://schemas.microsoft.com/office/powerpoint/2010/main" val="778745762"/>
       </p:ext>
     </p:extLst>
   </p:cSld>
@@ -2731,7 +2731,7 @@
           <p:cNvPr id="2" name="タイトル 1">
             <a:extLst>
               <a:ext uri="{FF2B5EF4-FFF2-40B4-BE49-F238E27FC236}">
-                <a16:creationId xmlns:a16="http://schemas.microsoft.com/office/drawing/2014/main" id="{37FC1D39-568F-24BA-13BE-459640382EC3}"/>
+                <a16:creationId xmlns:a16="http://schemas.microsoft.com/office/drawing/2014/main" id="{A1693CF9-2B51-6F83-102A-485E498FAEE9}"/>
               </a:ext>
             </a:extLst>
           </p:cNvPr>
@@ -2768,7 +2768,7 @@
           <p:cNvPr id="3" name="図プレースホルダー 2">
             <a:extLst>
               <a:ext uri="{FF2B5EF4-FFF2-40B4-BE49-F238E27FC236}">
-                <a16:creationId xmlns:a16="http://schemas.microsoft.com/office/drawing/2014/main" id="{30A49353-E6F1-4A2F-382B-4AED97262028}"/>
+                <a16:creationId xmlns:a16="http://schemas.microsoft.com/office/drawing/2014/main" id="{A6EE2597-3346-1BF2-F00F-662AEB07EF7C}"/>
               </a:ext>
             </a:extLst>
           </p:cNvPr>
@@ -2835,7 +2835,7 @@
           <p:cNvPr id="4" name="テキスト プレースホルダー 3">
             <a:extLst>
               <a:ext uri="{FF2B5EF4-FFF2-40B4-BE49-F238E27FC236}">
-                <a16:creationId xmlns:a16="http://schemas.microsoft.com/office/drawing/2014/main" id="{5CD1501B-2D52-A2AD-A802-4C1981FC27F8}"/>
+                <a16:creationId xmlns:a16="http://schemas.microsoft.com/office/drawing/2014/main" id="{6EF2685C-B217-1D70-0647-12D13D344912}"/>
               </a:ext>
             </a:extLst>
           </p:cNvPr>
@@ -2906,7 +2906,7 @@
           <p:cNvPr id="5" name="日付プレースホルダー 4">
             <a:extLst>
               <a:ext uri="{FF2B5EF4-FFF2-40B4-BE49-F238E27FC236}">
-                <a16:creationId xmlns:a16="http://schemas.microsoft.com/office/drawing/2014/main" id="{34D872B7-5FE9-81D1-D5C6-2A96232880CA}"/>
+                <a16:creationId xmlns:a16="http://schemas.microsoft.com/office/drawing/2014/main" id="{729610DD-34B4-B8CB-13C5-190274E05B6A}"/>
               </a:ext>
             </a:extLst>
           </p:cNvPr>
@@ -2922,7 +2922,7 @@
           <a:bodyPr/>
           <a:lstStyle/>
           <a:p>
-            <a:fld id="{6EB46A33-0AEF-471E-8391-11537EAA13C1}" type="datetimeFigureOut">
+            <a:fld id="{F7D6E4BD-B95D-4A7F-8880-9CD8EC4912DB}" type="datetimeFigureOut">
               <a:rPr kumimoji="1" lang="ja-JP" altLang="en-US" smtClean="0"/>
               <a:t>2026/7/30</a:t>
             </a:fld>
@@ -2935,7 +2935,7 @@
           <p:cNvPr id="6" name="フッター プレースホルダー 5">
             <a:extLst>
               <a:ext uri="{FF2B5EF4-FFF2-40B4-BE49-F238E27FC236}">
-                <a16:creationId xmlns:a16="http://schemas.microsoft.com/office/drawing/2014/main" id="{0CAFFB95-EBCD-22A8-1B8F-7DB290A0AEAC}"/>
+                <a16:creationId xmlns:a16="http://schemas.microsoft.com/office/drawing/2014/main" id="{2248ED92-7EBC-551A-E84B-ADC872B456B6}"/>
               </a:ext>
             </a:extLst>
           </p:cNvPr>
@@ -2960,7 +2960,7 @@
           <p:cNvPr id="7" name="スライド番号プレースホルダー 6">
             <a:extLst>
               <a:ext uri="{FF2B5EF4-FFF2-40B4-BE49-F238E27FC236}">
-                <a16:creationId xmlns:a16="http://schemas.microsoft.com/office/drawing/2014/main" id="{24E57F42-22DB-478C-6E7A-9D98ADBAC67E}"/>
+                <a16:creationId xmlns:a16="http://schemas.microsoft.com/office/drawing/2014/main" id="{561666DB-55D5-ECDB-2E78-BCC4FFA93160}"/>
               </a:ext>
             </a:extLst>
           </p:cNvPr>
@@ -2976,7 +2976,7 @@
           <a:bodyPr/>
           <a:lstStyle/>
           <a:p>
-            <a:fld id="{4258680A-FB25-4801-BC9E-B38DD995FA88}" type="slidenum">
+            <a:fld id="{84F66F6F-710D-4E00-B59F-752C2B749C44}" type="slidenum">
               <a:rPr kumimoji="1" lang="ja-JP" altLang="en-US" smtClean="0"/>
               <a:t>‹#›</a:t>
             </a:fld>
@@ -2987,7 +2987,7 @@
     </p:spTree>
     <p:extLst>
       <p:ext uri="{BB962C8B-B14F-4D97-AF65-F5344CB8AC3E}">
-        <p14:creationId xmlns:p14="http://schemas.microsoft.com/office/powerpoint/2010/main" val="1186844694"/>
+        <p14:creationId xmlns:p14="http://schemas.microsoft.com/office/powerpoint/2010/main" val="3597400469"/>
       </p:ext>
     </p:extLst>
   </p:cSld>
@@ -3024,7 +3024,7 @@
           <p:cNvPr id="2" name="タイトル プレースホルダー 1">
             <a:extLst>
               <a:ext uri="{FF2B5EF4-FFF2-40B4-BE49-F238E27FC236}">
-                <a16:creationId xmlns:a16="http://schemas.microsoft.com/office/drawing/2014/main" id="{F8427940-A3C2-01D7-4DC4-C74A62CE33C4}"/>
+                <a16:creationId xmlns:a16="http://schemas.microsoft.com/office/drawing/2014/main" id="{478E2FDF-0C39-F75D-3315-84D39DB41F6A}"/>
               </a:ext>
             </a:extLst>
           </p:cNvPr>
@@ -3062,7 +3062,7 @@
           <p:cNvPr id="3" name="テキスト プレースホルダー 2">
             <a:extLst>
               <a:ext uri="{FF2B5EF4-FFF2-40B4-BE49-F238E27FC236}">
-                <a16:creationId xmlns:a16="http://schemas.microsoft.com/office/drawing/2014/main" id="{BDF8E08B-A174-3F75-37EC-A97D7E3FC9A2}"/>
+                <a16:creationId xmlns:a16="http://schemas.microsoft.com/office/drawing/2014/main" id="{68B9F0B0-8B61-9370-6D71-85893BF3DCBA}"/>
               </a:ext>
             </a:extLst>
           </p:cNvPr>
@@ -3161,7 +3161,7 @@
           <p:cNvPr id="4" name="日付プレースホルダー 3">
             <a:extLst>
               <a:ext uri="{FF2B5EF4-FFF2-40B4-BE49-F238E27FC236}">
-                <a16:creationId xmlns:a16="http://schemas.microsoft.com/office/drawing/2014/main" id="{1709563F-94AA-F82C-7333-06A7AC941C46}"/>
+                <a16:creationId xmlns:a16="http://schemas.microsoft.com/office/drawing/2014/main" id="{B8490C60-6AFD-5BA1-0ACE-1434693BF71D}"/>
               </a:ext>
             </a:extLst>
           </p:cNvPr>
@@ -3195,7 +3195,7 @@
             </a:lvl1pPr>
           </a:lstStyle>
           <a:p>
-            <a:fld id="{6EB46A33-0AEF-471E-8391-11537EAA13C1}" type="datetimeFigureOut">
+            <a:fld id="{F7D6E4BD-B95D-4A7F-8880-9CD8EC4912DB}" type="datetimeFigureOut">
               <a:rPr kumimoji="1" lang="ja-JP" altLang="en-US" smtClean="0"/>
               <a:t>2026/7/30</a:t>
             </a:fld>
@@ -3208,7 +3208,7 @@
           <p:cNvPr id="5" name="フッター プレースホルダー 4">
             <a:extLst>
               <a:ext uri="{FF2B5EF4-FFF2-40B4-BE49-F238E27FC236}">
-                <a16:creationId xmlns:a16="http://schemas.microsoft.com/office/drawing/2014/main" id="{25650C0D-1856-A041-1DCF-9110472F42DD}"/>
+                <a16:creationId xmlns:a16="http://schemas.microsoft.com/office/drawing/2014/main" id="{3DDD2F4E-0D8A-3B5F-77DA-D43BE0A5C1A8}"/>
               </a:ext>
             </a:extLst>
           </p:cNvPr>
@@ -3251,7 +3251,7 @@
           <p:cNvPr id="6" name="スライド番号プレースホルダー 5">
             <a:extLst>
               <a:ext uri="{FF2B5EF4-FFF2-40B4-BE49-F238E27FC236}">
-                <a16:creationId xmlns:a16="http://schemas.microsoft.com/office/drawing/2014/main" id="{DB35ADE5-74BB-5DD8-8A97-C79DE219F57D}"/>
+                <a16:creationId xmlns:a16="http://schemas.microsoft.com/office/drawing/2014/main" id="{566A4D65-A6C2-C4D9-5AFE-202ECF41FC25}"/>
               </a:ext>
             </a:extLst>
           </p:cNvPr>
@@ -3285,7 +3285,7 @@
             </a:lvl1pPr>
           </a:lstStyle>
           <a:p>
-            <a:fld id="{4258680A-FB25-4801-BC9E-B38DD995FA88}" type="slidenum">
+            <a:fld id="{84F66F6F-710D-4E00-B59F-752C2B749C44}" type="slidenum">
               <a:rPr kumimoji="1" lang="ja-JP" altLang="en-US" smtClean="0"/>
               <a:t>‹#›</a:t>
             </a:fld>
@@ -3296,7 +3296,7 @@
     </p:spTree>
     <p:extLst>
       <p:ext uri="{BB962C8B-B14F-4D97-AF65-F5344CB8AC3E}">
-        <p14:creationId xmlns:p14="http://schemas.microsoft.com/office/powerpoint/2010/main" val="682754057"/>
+        <p14:creationId xmlns:p14="http://schemas.microsoft.com/office/powerpoint/2010/main" val="69458891"/>
       </p:ext>
     </p:extLst>
   </p:cSld>
@@ -3619,7 +3619,7 @@
           <p:cNvPr id="2" name="テキスト ボックス 1">
             <a:extLst>
               <a:ext uri="{FF2B5EF4-FFF2-40B4-BE49-F238E27FC236}">
-                <a16:creationId xmlns:a16="http://schemas.microsoft.com/office/drawing/2014/main" id="{936F8975-8A63-6F8E-A445-11975C0B1FA6}"/>
+                <a16:creationId xmlns:a16="http://schemas.microsoft.com/office/drawing/2014/main" id="{7DBC129D-E985-7FEF-D18F-E7DD52BB26ED}"/>
               </a:ext>
             </a:extLst>
           </p:cNvPr>
@@ -3665,7 +3665,7 @@
           <p:cNvPr id="3" name="テキスト ボックス 2">
             <a:extLst>
               <a:ext uri="{FF2B5EF4-FFF2-40B4-BE49-F238E27FC236}">
-                <a16:creationId xmlns:a16="http://schemas.microsoft.com/office/drawing/2014/main" id="{EAB11FDF-EA42-68C3-1D7D-9D323B10263D}"/>
+                <a16:creationId xmlns:a16="http://schemas.microsoft.com/office/drawing/2014/main" id="{BC3C39A8-13E8-9A1B-9BFD-2ECB21651508}"/>
               </a:ext>
             </a:extLst>
           </p:cNvPr>
@@ -3714,7 +3714,7 @@
           <p:cNvPr id="4" name="テキスト ボックス 3">
             <a:extLst>
               <a:ext uri="{FF2B5EF4-FFF2-40B4-BE49-F238E27FC236}">
-                <a16:creationId xmlns:a16="http://schemas.microsoft.com/office/drawing/2014/main" id="{8AC7F423-1EF1-B1EB-88B1-DFF866BDB259}"/>
+                <a16:creationId xmlns:a16="http://schemas.microsoft.com/office/drawing/2014/main" id="{1D6151BF-3D63-433B-D2C6-CB14A7E2C44F}"/>
               </a:ext>
             </a:extLst>
           </p:cNvPr>
@@ -3754,7 +3754,7 @@
           <p:cNvPr id="5" name="テキスト ボックス 4">
             <a:extLst>
               <a:ext uri="{FF2B5EF4-FFF2-40B4-BE49-F238E27FC236}">
-                <a16:creationId xmlns:a16="http://schemas.microsoft.com/office/drawing/2014/main" id="{8AB023BC-CCD7-B6F7-9292-A850AD1E7D99}"/>
+                <a16:creationId xmlns:a16="http://schemas.microsoft.com/office/drawing/2014/main" id="{42122EB6-08CA-2C48-2A52-A824F02ACFD2}"/>
               </a:ext>
             </a:extLst>
           </p:cNvPr>
@@ -3801,7 +3801,7 @@
             <a:hlinkClick r:id="" action="ppaction://media"/>
             <a:extLst>
               <a:ext uri="{FF2B5EF4-FFF2-40B4-BE49-F238E27FC236}">
-                <a16:creationId xmlns:a16="http://schemas.microsoft.com/office/drawing/2014/main" id="{290508E2-8087-76B0-E00A-2357974F31DA}"/>
+                <a16:creationId xmlns:a16="http://schemas.microsoft.com/office/drawing/2014/main" id="{0CD418A2-434C-A08A-52A5-698365E57D4E}"/>
               </a:ext>
             </a:extLst>
           </p:cNvPr>
@@ -3836,7 +3836,7 @@
     </p:spTree>
     <p:extLst>
       <p:ext uri="{BB962C8B-B14F-4D97-AF65-F5344CB8AC3E}">
-        <p14:creationId xmlns:p14="http://schemas.microsoft.com/office/powerpoint/2010/main" val="2870850235"/>
+        <p14:creationId xmlns:p14="http://schemas.microsoft.com/office/powerpoint/2010/main" val="2694799940"/>
       </p:ext>
     </p:extLst>
   </p:cSld>
@@ -3960,7 +3960,7 @@
           <p:cNvPr id="2" name="テキスト ボックス 1">
             <a:extLst>
               <a:ext uri="{FF2B5EF4-FFF2-40B4-BE49-F238E27FC236}">
-                <a16:creationId xmlns:a16="http://schemas.microsoft.com/office/drawing/2014/main" id="{B3DB85D4-246B-6C8F-1527-60EBD45FD10A}"/>
+                <a16:creationId xmlns:a16="http://schemas.microsoft.com/office/drawing/2014/main" id="{5922131D-E71A-F58B-6F47-59CEBDCF2055}"/>
               </a:ext>
             </a:extLst>
           </p:cNvPr>
@@ -4006,7 +4006,7 @@
           <p:cNvPr id="3" name="テキスト ボックス 2">
             <a:extLst>
               <a:ext uri="{FF2B5EF4-FFF2-40B4-BE49-F238E27FC236}">
-                <a16:creationId xmlns:a16="http://schemas.microsoft.com/office/drawing/2014/main" id="{8BB92143-593F-EB4A-BF94-A0C60736F7EA}"/>
+                <a16:creationId xmlns:a16="http://schemas.microsoft.com/office/drawing/2014/main" id="{0140DDD6-9039-7360-0C2B-AC4D736F0A80}"/>
               </a:ext>
             </a:extLst>
           </p:cNvPr>
@@ -4046,7 +4046,7 @@
           <p:cNvPr id="4" name="テキスト ボックス 3">
             <a:extLst>
               <a:ext uri="{FF2B5EF4-FFF2-40B4-BE49-F238E27FC236}">
-                <a16:creationId xmlns:a16="http://schemas.microsoft.com/office/drawing/2014/main" id="{7F917115-0FE3-5802-3EEF-B289A6159157}"/>
+                <a16:creationId xmlns:a16="http://schemas.microsoft.com/office/drawing/2014/main" id="{39F3D5C5-990C-3E85-5CC4-F4D5A14CFB48}"/>
               </a:ext>
             </a:extLst>
           </p:cNvPr>
@@ -4076,14 +4076,17 @@
                 </a:solidFill>
                 <a:latin typeface="Arial" panose="020B0604020202020204" pitchFamily="34" charset="0"/>
               </a:rPr>
-              <a:t>Work Bar Navi Recommended repository: work bar navi Confirmed domain: workbar</a:t>
-            </a:r>
-            <a:endParaRPr kumimoji="1" lang="ja-JP" altLang="en-US" sz="2000">
-              <a:solidFill>
-                <a:srgbClr val="333333"/>
-              </a:solidFill>
-              <a:latin typeface="Arial" panose="020B0604020202020204" pitchFamily="34" charset="0"/>
-            </a:endParaRPr>
+              <a:t>Work Bar Navi</a:t>
+            </a:r>
+            <a:r>
+              <a:rPr kumimoji="1" lang="ja-JP" altLang="en-US" sz="2000">
+                <a:solidFill>
+                  <a:srgbClr val="333333"/>
+                </a:solidFill>
+                <a:latin typeface="Arial" panose="020B0604020202020204" pitchFamily="34" charset="0"/>
+              </a:rPr>
+              <a:t>の目的、構成、実装を公開コードから確認できるプロジェクトです。</a:t>
+            </a:r>
           </a:p>
         </p:txBody>
       </p:sp>
@@ -4092,7 +4095,7 @@
           <p:cNvPr id="5" name="テキスト ボックス 4">
             <a:extLst>
               <a:ext uri="{FF2B5EF4-FFF2-40B4-BE49-F238E27FC236}">
-                <a16:creationId xmlns:a16="http://schemas.microsoft.com/office/drawing/2014/main" id="{7D0E6787-E1E4-BBF3-3FD9-539F09C8F7A1}"/>
+                <a16:creationId xmlns:a16="http://schemas.microsoft.com/office/drawing/2014/main" id="{56D98AE0-E9F6-51C3-358A-A24517B75DED}"/>
               </a:ext>
             </a:extLst>
           </p:cNvPr>
@@ -4139,7 +4142,7 @@
             <a:hlinkClick r:id="" action="ppaction://media"/>
             <a:extLst>
               <a:ext uri="{FF2B5EF4-FFF2-40B4-BE49-F238E27FC236}">
-                <a16:creationId xmlns:a16="http://schemas.microsoft.com/office/drawing/2014/main" id="{5DBD8D83-0E44-FD89-4C0F-63B721F4BB63}"/>
+                <a16:creationId xmlns:a16="http://schemas.microsoft.com/office/drawing/2014/main" id="{50BE1A86-EA6C-0E85-7123-2A3BF9A64770}"/>
               </a:ext>
             </a:extLst>
           </p:cNvPr>
@@ -4174,7 +4177,7 @@
     </p:spTree>
     <p:extLst>
       <p:ext uri="{BB962C8B-B14F-4D97-AF65-F5344CB8AC3E}">
-        <p14:creationId xmlns:p14="http://schemas.microsoft.com/office/powerpoint/2010/main" val="2531011830"/>
+        <p14:creationId xmlns:p14="http://schemas.microsoft.com/office/powerpoint/2010/main" val="252367487"/>
       </p:ext>
     </p:extLst>
   </p:cSld>
@@ -4183,10 +4186,10 @@
   </p:clrMapOvr>
   <mc:AlternateContent xmlns:mc="http://schemas.openxmlformats.org/markup-compatibility/2006">
     <mc:Choice xmlns:p14="http://schemas.microsoft.com/office/powerpoint/2010/main" Requires="p14">
-      <p:transition spd="slow" p14:dur="2000" advTm="7000"/>
+      <p:transition spd="slow" p14:dur="2000" advTm="8000"/>
     </mc:Choice>
     <mc:Fallback>
-      <p:transition spd="slow" advTm="7000"/>
+      <p:transition spd="slow" advTm="8000"/>
     </mc:Fallback>
   </mc:AlternateContent>
   <p:timing>
@@ -4217,7 +4220,7 @@
                                   <p:childTnLst>
                                     <p:cmd type="call" cmd="playFrom(0.0)">
                                       <p:cBhvr>
-                                        <p:cTn id="6" dur="6522" fill="hold"/>
+                                        <p:cTn id="6" dur="7091" fill="hold"/>
                                         <p:tgtEl>
                                           <p:spTgt spid="6"/>
                                         </p:tgtEl>
@@ -4298,7 +4301,7 @@
           <p:cNvPr id="2" name="テキスト ボックス 1">
             <a:extLst>
               <a:ext uri="{FF2B5EF4-FFF2-40B4-BE49-F238E27FC236}">
-                <a16:creationId xmlns:a16="http://schemas.microsoft.com/office/drawing/2014/main" id="{64E19002-E507-D73A-8C32-829ABE445390}"/>
+                <a16:creationId xmlns:a16="http://schemas.microsoft.com/office/drawing/2014/main" id="{18EEAF5F-49C7-6627-9FE1-91657895072A}"/>
               </a:ext>
             </a:extLst>
           </p:cNvPr>
@@ -4344,7 +4347,7 @@
           <p:cNvPr id="3" name="テキスト ボックス 2">
             <a:extLst>
               <a:ext uri="{FF2B5EF4-FFF2-40B4-BE49-F238E27FC236}">
-                <a16:creationId xmlns:a16="http://schemas.microsoft.com/office/drawing/2014/main" id="{5D47C0AE-29A1-F6D8-F8BC-21CEA59DAB49}"/>
+                <a16:creationId xmlns:a16="http://schemas.microsoft.com/office/drawing/2014/main" id="{04F23E74-C5CD-5469-9C46-41E4251817FC}"/>
               </a:ext>
             </a:extLst>
           </p:cNvPr>
@@ -4384,7 +4387,7 @@
           <p:cNvPr id="4" name="テキスト ボックス 3">
             <a:extLst>
               <a:ext uri="{FF2B5EF4-FFF2-40B4-BE49-F238E27FC236}">
-                <a16:creationId xmlns:a16="http://schemas.microsoft.com/office/drawing/2014/main" id="{4E88982F-3B01-5D2C-3E53-807FD57C1F78}"/>
+                <a16:creationId xmlns:a16="http://schemas.microsoft.com/office/drawing/2014/main" id="{A3D71FA4-912C-9CD3-2FBB-DFB7BEA75701}"/>
               </a:ext>
             </a:extLst>
           </p:cNvPr>
@@ -4479,7 +4482,7 @@
           <p:cNvPr id="5" name="テキスト ボックス 4">
             <a:extLst>
               <a:ext uri="{FF2B5EF4-FFF2-40B4-BE49-F238E27FC236}">
-                <a16:creationId xmlns:a16="http://schemas.microsoft.com/office/drawing/2014/main" id="{F675B704-AEED-FA89-023F-ED71641F04D3}"/>
+                <a16:creationId xmlns:a16="http://schemas.microsoft.com/office/drawing/2014/main" id="{0235CB6C-E959-7383-E352-9F1B6DED6591}"/>
               </a:ext>
             </a:extLst>
           </p:cNvPr>
@@ -4526,7 +4529,7 @@
             <a:hlinkClick r:id="" action="ppaction://media"/>
             <a:extLst>
               <a:ext uri="{FF2B5EF4-FFF2-40B4-BE49-F238E27FC236}">
-                <a16:creationId xmlns:a16="http://schemas.microsoft.com/office/drawing/2014/main" id="{F93056C7-4CE9-3EC6-0455-44C6DD39C0F5}"/>
+                <a16:creationId xmlns:a16="http://schemas.microsoft.com/office/drawing/2014/main" id="{D0D2F5DA-6E15-3FD3-E7EC-D2EE6002D967}"/>
               </a:ext>
             </a:extLst>
           </p:cNvPr>
@@ -4561,7 +4564,7 @@
     </p:spTree>
     <p:extLst>
       <p:ext uri="{BB962C8B-B14F-4D97-AF65-F5344CB8AC3E}">
-        <p14:creationId xmlns:p14="http://schemas.microsoft.com/office/powerpoint/2010/main" val="611547753"/>
+        <p14:creationId xmlns:p14="http://schemas.microsoft.com/office/powerpoint/2010/main" val="3174805430"/>
       </p:ext>
     </p:extLst>
   </p:cSld>
@@ -4685,7 +4688,7 @@
           <p:cNvPr id="2" name="テキスト ボックス 1">
             <a:extLst>
               <a:ext uri="{FF2B5EF4-FFF2-40B4-BE49-F238E27FC236}">
-                <a16:creationId xmlns:a16="http://schemas.microsoft.com/office/drawing/2014/main" id="{49B54975-AE6E-5FE9-ACD8-C9C9FD67A5FE}"/>
+                <a16:creationId xmlns:a16="http://schemas.microsoft.com/office/drawing/2014/main" id="{37DF6446-6DF7-69A9-C69B-437F7FF78641}"/>
               </a:ext>
             </a:extLst>
           </p:cNvPr>
@@ -4731,7 +4734,7 @@
           <p:cNvPr id="3" name="テキスト ボックス 2">
             <a:extLst>
               <a:ext uri="{FF2B5EF4-FFF2-40B4-BE49-F238E27FC236}">
-                <a16:creationId xmlns:a16="http://schemas.microsoft.com/office/drawing/2014/main" id="{BA9F1628-9FC2-8233-3711-6CE855C9119E}"/>
+                <a16:creationId xmlns:a16="http://schemas.microsoft.com/office/drawing/2014/main" id="{8180DB03-5D30-2D6F-73DF-1C13D75902C2}"/>
               </a:ext>
             </a:extLst>
           </p:cNvPr>
@@ -4771,7 +4774,7 @@
           <p:cNvPr id="4" name="テキスト ボックス 3">
             <a:extLst>
               <a:ext uri="{FF2B5EF4-FFF2-40B4-BE49-F238E27FC236}">
-                <a16:creationId xmlns:a16="http://schemas.microsoft.com/office/drawing/2014/main" id="{06788E4D-4E98-DABE-781A-0161C6CA7946}"/>
+                <a16:creationId xmlns:a16="http://schemas.microsoft.com/office/drawing/2014/main" id="{39A9E275-0722-31FF-FEB3-998387848799}"/>
               </a:ext>
             </a:extLst>
           </p:cNvPr>
@@ -4881,7 +4884,7 @@
           <p:cNvPr id="5" name="テキスト ボックス 4">
             <a:extLst>
               <a:ext uri="{FF2B5EF4-FFF2-40B4-BE49-F238E27FC236}">
-                <a16:creationId xmlns:a16="http://schemas.microsoft.com/office/drawing/2014/main" id="{7DEA4968-AEA9-7CB0-1C1D-A6D8692F55C8}"/>
+                <a16:creationId xmlns:a16="http://schemas.microsoft.com/office/drawing/2014/main" id="{DFCC6922-2D72-6E95-1C10-3B0F2165EE88}"/>
               </a:ext>
             </a:extLst>
           </p:cNvPr>
@@ -4928,7 +4931,7 @@
             <a:hlinkClick r:id="" action="ppaction://media"/>
             <a:extLst>
               <a:ext uri="{FF2B5EF4-FFF2-40B4-BE49-F238E27FC236}">
-                <a16:creationId xmlns:a16="http://schemas.microsoft.com/office/drawing/2014/main" id="{D173A2DF-74B5-C50D-6F89-88971F121CEC}"/>
+                <a16:creationId xmlns:a16="http://schemas.microsoft.com/office/drawing/2014/main" id="{18238A14-C42A-2356-416B-FCB5E3F28F3D}"/>
               </a:ext>
             </a:extLst>
           </p:cNvPr>
@@ -4963,7 +4966,7 @@
     </p:spTree>
     <p:extLst>
       <p:ext uri="{BB962C8B-B14F-4D97-AF65-F5344CB8AC3E}">
-        <p14:creationId xmlns:p14="http://schemas.microsoft.com/office/powerpoint/2010/main" val="3579470065"/>
+        <p14:creationId xmlns:p14="http://schemas.microsoft.com/office/powerpoint/2010/main" val="3420912734"/>
       </p:ext>
     </p:extLst>
   </p:cSld>
@@ -5087,7 +5090,7 @@
           <p:cNvPr id="2" name="テキスト ボックス 1">
             <a:extLst>
               <a:ext uri="{FF2B5EF4-FFF2-40B4-BE49-F238E27FC236}">
-                <a16:creationId xmlns:a16="http://schemas.microsoft.com/office/drawing/2014/main" id="{F79EBDFA-5D58-E358-F837-709A0ECCDBF9}"/>
+                <a16:creationId xmlns:a16="http://schemas.microsoft.com/office/drawing/2014/main" id="{8DEDB65E-C161-EEC6-1C6C-450531F95978}"/>
               </a:ext>
             </a:extLst>
           </p:cNvPr>
@@ -5133,7 +5136,7 @@
           <p:cNvPr id="3" name="テキスト ボックス 2">
             <a:extLst>
               <a:ext uri="{FF2B5EF4-FFF2-40B4-BE49-F238E27FC236}">
-                <a16:creationId xmlns:a16="http://schemas.microsoft.com/office/drawing/2014/main" id="{C58464E6-7FE8-3C07-CD18-43F9224473C4}"/>
+                <a16:creationId xmlns:a16="http://schemas.microsoft.com/office/drawing/2014/main" id="{C9030F31-B7B8-511C-AC26-0A9FCEC89B5E}"/>
               </a:ext>
             </a:extLst>
           </p:cNvPr>
@@ -5173,7 +5176,7 @@
           <p:cNvPr id="4" name="テキスト ボックス 3">
             <a:extLst>
               <a:ext uri="{FF2B5EF4-FFF2-40B4-BE49-F238E27FC236}">
-                <a16:creationId xmlns:a16="http://schemas.microsoft.com/office/drawing/2014/main" id="{15EDA04D-7000-2561-8004-825CC96E1445}"/>
+                <a16:creationId xmlns:a16="http://schemas.microsoft.com/office/drawing/2014/main" id="{31878310-8510-D02D-ADAE-361B14DB836A}"/>
               </a:ext>
             </a:extLst>
           </p:cNvPr>
@@ -5197,20 +5200,14 @@
           <a:lstStyle/>
           <a:p>
             <a:r>
-              <a:rPr kumimoji="1" lang="en-US" altLang="ja-JP" sz="2000">
+              <a:rPr kumimoji="1" lang="ja-JP" altLang="en-US" sz="2000">
                 <a:solidFill>
                   <a:srgbClr val="333333"/>
                 </a:solidFill>
                 <a:latin typeface="Arial" panose="020B0604020202020204" pitchFamily="34" charset="0"/>
               </a:rPr>
-              <a:t>Set confirmed custom domain</a:t>
-            </a:r>
-            <a:endParaRPr kumimoji="1" lang="ja-JP" altLang="en-US" sz="2000">
-              <a:solidFill>
-                <a:srgbClr val="333333"/>
-              </a:solidFill>
-              <a:latin typeface="Arial" panose="020B0604020202020204" pitchFamily="34" charset="0"/>
-            </a:endParaRPr>
+              <a:t>直近のコミットでは、実装の見直しと継続的な改善が行われました。</a:t>
+            </a:r>
           </a:p>
         </p:txBody>
       </p:sp>
@@ -5219,7 +5216,7 @@
           <p:cNvPr id="5" name="テキスト ボックス 4">
             <a:extLst>
               <a:ext uri="{FF2B5EF4-FFF2-40B4-BE49-F238E27FC236}">
-                <a16:creationId xmlns:a16="http://schemas.microsoft.com/office/drawing/2014/main" id="{6CA9E4C5-4337-F81D-4037-877CF169B8E9}"/>
+                <a16:creationId xmlns:a16="http://schemas.microsoft.com/office/drawing/2014/main" id="{34693482-1215-B384-D2D2-2588B2803149}"/>
               </a:ext>
             </a:extLst>
           </p:cNvPr>
@@ -5266,7 +5263,7 @@
             <a:hlinkClick r:id="" action="ppaction://media"/>
             <a:extLst>
               <a:ext uri="{FF2B5EF4-FFF2-40B4-BE49-F238E27FC236}">
-                <a16:creationId xmlns:a16="http://schemas.microsoft.com/office/drawing/2014/main" id="{03367F3F-9DC7-6C94-3D3F-A25AFFC61C5E}"/>
+                <a16:creationId xmlns:a16="http://schemas.microsoft.com/office/drawing/2014/main" id="{FC0C84BD-D50D-96C0-163D-B735234B50A3}"/>
               </a:ext>
             </a:extLst>
           </p:cNvPr>
@@ -5301,7 +5298,7 @@
     </p:spTree>
     <p:extLst>
       <p:ext uri="{BB962C8B-B14F-4D97-AF65-F5344CB8AC3E}">
-        <p14:creationId xmlns:p14="http://schemas.microsoft.com/office/powerpoint/2010/main" val="3275784734"/>
+        <p14:creationId xmlns:p14="http://schemas.microsoft.com/office/powerpoint/2010/main" val="418559916"/>
       </p:ext>
     </p:extLst>
   </p:cSld>
@@ -5344,7 +5341,7 @@
                                   <p:childTnLst>
                                     <p:cmd type="call" cmd="playFrom(0.0)">
                                       <p:cBhvr>
-                                        <p:cTn id="6" dur="6451" fill="hold"/>
+                                        <p:cTn id="6" dur="6076" fill="hold"/>
                                         <p:tgtEl>
                                           <p:spTgt spid="6"/>
                                         </p:tgtEl>
@@ -5425,7 +5422,7 @@
           <p:cNvPr id="2" name="テキスト ボックス 1">
             <a:extLst>
               <a:ext uri="{FF2B5EF4-FFF2-40B4-BE49-F238E27FC236}">
-                <a16:creationId xmlns:a16="http://schemas.microsoft.com/office/drawing/2014/main" id="{61B99C81-B82E-785F-AF4B-5AB22ACD6123}"/>
+                <a16:creationId xmlns:a16="http://schemas.microsoft.com/office/drawing/2014/main" id="{83458AD4-71E4-26DB-C9DD-5199A6C24D4D}"/>
               </a:ext>
             </a:extLst>
           </p:cNvPr>
@@ -5471,7 +5468,7 @@
           <p:cNvPr id="3" name="テキスト ボックス 2">
             <a:extLst>
               <a:ext uri="{FF2B5EF4-FFF2-40B4-BE49-F238E27FC236}">
-                <a16:creationId xmlns:a16="http://schemas.microsoft.com/office/drawing/2014/main" id="{BC277CAC-BB57-BDB6-CCDC-D1A662266512}"/>
+                <a16:creationId xmlns:a16="http://schemas.microsoft.com/office/drawing/2014/main" id="{5639EF47-6169-4CA7-FA71-92B98CA4A172}"/>
               </a:ext>
             </a:extLst>
           </p:cNvPr>
@@ -5511,7 +5508,7 @@
           <p:cNvPr id="4" name="テキスト ボックス 3">
             <a:extLst>
               <a:ext uri="{FF2B5EF4-FFF2-40B4-BE49-F238E27FC236}">
-                <a16:creationId xmlns:a16="http://schemas.microsoft.com/office/drawing/2014/main" id="{9D003287-D81F-C9A5-77A6-B5D7398EDB9D}"/>
+                <a16:creationId xmlns:a16="http://schemas.microsoft.com/office/drawing/2014/main" id="{E471A515-EC16-6025-1EE6-77AD54CBD1C7}"/>
               </a:ext>
             </a:extLst>
           </p:cNvPr>
@@ -5576,7 +5573,7 @@
           <p:cNvPr id="5" name="テキスト ボックス 4">
             <a:extLst>
               <a:ext uri="{FF2B5EF4-FFF2-40B4-BE49-F238E27FC236}">
-                <a16:creationId xmlns:a16="http://schemas.microsoft.com/office/drawing/2014/main" id="{C03E15C5-99FA-28B5-F734-7F617513745E}"/>
+                <a16:creationId xmlns:a16="http://schemas.microsoft.com/office/drawing/2014/main" id="{23192249-032E-0B87-3356-01ACEF997B33}"/>
               </a:ext>
             </a:extLst>
           </p:cNvPr>
@@ -5623,7 +5620,7 @@
             <a:hlinkClick r:id="" action="ppaction://media"/>
             <a:extLst>
               <a:ext uri="{FF2B5EF4-FFF2-40B4-BE49-F238E27FC236}">
-                <a16:creationId xmlns:a16="http://schemas.microsoft.com/office/drawing/2014/main" id="{BC9D41D1-8F85-B634-7578-8237E4EED932}"/>
+                <a16:creationId xmlns:a16="http://schemas.microsoft.com/office/drawing/2014/main" id="{6AAAF04F-3174-C867-9B4B-A866CE313375}"/>
               </a:ext>
             </a:extLst>
           </p:cNvPr>
@@ -5658,7 +5655,7 @@
     </p:spTree>
     <p:extLst>
       <p:ext uri="{BB962C8B-B14F-4D97-AF65-F5344CB8AC3E}">
-        <p14:creationId xmlns:p14="http://schemas.microsoft.com/office/powerpoint/2010/main" val="2383784289"/>
+        <p14:creationId xmlns:p14="http://schemas.microsoft.com/office/powerpoint/2010/main" val="1156629536"/>
       </p:ext>
     </p:extLst>
   </p:cSld>
